--- a/docs/reports/project-status-2026-06-22.pptx
+++ b/docs/reports/project-status-2026-06-22.pptx
@@ -5089,7 +5089,7 @@
                   <a:srgbClr val="15323A"/>
                 </a:solidFill>
               </a:rPr>
-              <a:t>预览 iframe 中可选中元素并把选择器、文本、路径带回对话，支持针对页面元素迭代修改。</a:t>
+              <a:t>预览 iframe 中可选择页面元素，并把选择器、文本、路径带回对话，支持针对页面元素迭代修改。</a:t>
             </a:r>
             <a:endParaRPr lang="en-US" sz="1130" dirty="0"/>
           </a:p>
@@ -6795,7 +6795,21 @@
                   <a:srgbClr val="15323A"/>
                 </a:solidFill>
               </a:rPr>
-              <a:t>Redis 限流、Actuator、Prometheus 依赖</a:t>
+              <a:t>限流与监控依赖</a:t>
+            </a:r>
+            <a:endParaRPr lang="en-US" sz="1120" dirty="0"/>
+          </a:p>
+          <a:p>
+            <a:pPr algn="l" indent="0" marL="0">
+              <a:buNone/>
+            </a:pPr>
+            <a:r>
+              <a:rPr lang="en-US" sz="1120" dirty="0">
+                <a:solidFill>
+                  <a:srgbClr val="15323A"/>
+                </a:solidFill>
+              </a:rPr>
+              <a:t>Actuator / Prometheus registry</a:t>
             </a:r>
             <a:endParaRPr lang="en-US" sz="1120" dirty="0"/>
           </a:p>
